--- a/data/deep_dives/carteira_altomax_fidc_8c1d0690/exports/documentary_comparison.pptx
+++ b/data/deep_dives/carteira_altomax_fidc_8c1d0690/exports/documentary_comparison.pptx
@@ -4286,7 +4286,7 @@
                       <a:r>
                         <a:rPr sz="1300" b="1">
                           <a:solidFill>
-                            <a:srgbClr val="1F1F1F"/>
+                            <a:srgbClr val="FFFFFF"/>
                           </a:solidFill>
                           <a:latin typeface="Calibri"/>
                         </a:rPr>
@@ -4296,7 +4296,7 @@
                   </a:txBody>
                   <a:tcPr marL="91440" marR="91440" marT="41148" marB="41148" anchor="ctr">
                     <a:solidFill>
-                      <a:srgbClr val="EC7000"/>
+                      <a:srgbClr val="FF6200"/>
                     </a:solidFill>
                     <a:lnL>
                       <a:noFill/>
@@ -4335,7 +4335,7 @@
                       <a:r>
                         <a:rPr sz="1300" b="1">
                           <a:solidFill>
-                            <a:srgbClr val="1F1F1F"/>
+                            <a:srgbClr val="FFFFFF"/>
                           </a:solidFill>
                           <a:latin typeface="Calibri"/>
                         </a:rPr>
@@ -4345,7 +4345,7 @@
                   </a:txBody>
                   <a:tcPr marL="91440" marR="91440" marT="41148" marB="41148" anchor="ctr">
                     <a:solidFill>
-                      <a:srgbClr val="EC7000"/>
+                      <a:srgbClr val="FF6200"/>
                     </a:solidFill>
                     <a:lnL>
                       <a:noFill/>
@@ -4533,7 +4533,7 @@
                           </a:solidFill>
                           <a:latin typeface="Calibri"/>
                         </a:rPr>
-                        <a:t>Não confirmado na revisão dirigida; conferir documento ou cláusula específica.</a:t>
+                        <a:t>-</a:t>
                       </a:r>
                     </a:p>
                   </a:txBody>
@@ -4629,7 +4629,7 @@
                           </a:solidFill>
                           <a:latin typeface="Calibri"/>
                         </a:rPr>
-                        <a:t>Não confirmado na revisão dirigida; conferir documento ou cláusula específica.</a:t>
+                        <a:t>-</a:t>
                       </a:r>
                     </a:p>
                   </a:txBody>
@@ -4725,7 +4725,7 @@
                           </a:solidFill>
                           <a:latin typeface="Calibri"/>
                         </a:rPr>
-                        <a:t>Não confirmado na revisão dirigida; conferir documento ou cláusula específica.</a:t>
+                        <a:t>-</a:t>
                       </a:r>
                     </a:p>
                   </a:txBody>
@@ -4917,7 +4917,7 @@
                           </a:solidFill>
                           <a:latin typeface="Calibri"/>
                         </a:rPr>
-                        <a:t>Não confirmado na revisão dirigida; conferir documento ou cláusula específica.</a:t>
+                        <a:t>-</a:t>
                       </a:r>
                     </a:p>
                   </a:txBody>
@@ -5219,7 +5219,7 @@
                       <a:r>
                         <a:rPr sz="1300" b="1">
                           <a:solidFill>
-                            <a:srgbClr val="1F1F1F"/>
+                            <a:srgbClr val="FFFFFF"/>
                           </a:solidFill>
                           <a:latin typeface="Calibri"/>
                         </a:rPr>
@@ -5229,7 +5229,7 @@
                   </a:txBody>
                   <a:tcPr marL="91440" marR="91440" marT="41148" marB="41148" anchor="ctr">
                     <a:solidFill>
-                      <a:srgbClr val="EC7000"/>
+                      <a:srgbClr val="FF6200"/>
                     </a:solidFill>
                     <a:lnL>
                       <a:noFill/>
@@ -5268,7 +5268,7 @@
                       <a:r>
                         <a:rPr sz="1300" b="1">
                           <a:solidFill>
-                            <a:srgbClr val="1F1F1F"/>
+                            <a:srgbClr val="FFFFFF"/>
                           </a:solidFill>
                           <a:latin typeface="Calibri"/>
                         </a:rPr>
@@ -5278,7 +5278,7 @@
                   </a:txBody>
                   <a:tcPr marL="91440" marR="91440" marT="41148" marB="41148" anchor="ctr">
                     <a:solidFill>
-                      <a:srgbClr val="EC7000"/>
+                      <a:srgbClr val="FF6200"/>
                     </a:solidFill>
                     <a:lnL>
                       <a:noFill/>
@@ -5800,7 +5800,7 @@
                           </a:solidFill>
                           <a:latin typeface="Calibri"/>
                         </a:rPr>
-                        <a:t>Não confirmado na revisão dirigida; conferir documento ou cláusula específica.</a:t>
+                        <a:t>-</a:t>
                       </a:r>
                     </a:p>
                   </a:txBody>
@@ -6004,7 +6004,7 @@
                       <a:r>
                         <a:rPr sz="1300" b="1">
                           <a:solidFill>
-                            <a:srgbClr val="1F1F1F"/>
+                            <a:srgbClr val="FFFFFF"/>
                           </a:solidFill>
                           <a:latin typeface="Calibri"/>
                         </a:rPr>
@@ -6014,7 +6014,7 @@
                   </a:txBody>
                   <a:tcPr marL="91440" marR="91440" marT="41148" marB="41148" anchor="ctr">
                     <a:solidFill>
-                      <a:srgbClr val="EC7000"/>
+                      <a:srgbClr val="FF6200"/>
                     </a:solidFill>
                     <a:lnL>
                       <a:noFill/>
@@ -6053,7 +6053,7 @@
                       <a:r>
                         <a:rPr sz="1300" b="1">
                           <a:solidFill>
-                            <a:srgbClr val="1F1F1F"/>
+                            <a:srgbClr val="FFFFFF"/>
                           </a:solidFill>
                           <a:latin typeface="Calibri"/>
                         </a:rPr>
@@ -6063,7 +6063,7 @@
                   </a:txBody>
                   <a:tcPr marL="91440" marR="91440" marT="41148" marB="41148" anchor="ctr">
                     <a:solidFill>
-                      <a:srgbClr val="EC7000"/>
+                      <a:srgbClr val="FF6200"/>
                     </a:solidFill>
                     <a:lnL>
                       <a:noFill/>
@@ -6251,7 +6251,7 @@
                           </a:solidFill>
                           <a:latin typeface="Calibri"/>
                         </a:rPr>
-                        <a:t>Não confirmado na revisão dirigida; conferir documento ou cláusula específica.</a:t>
+                        <a:t>-</a:t>
                       </a:r>
                     </a:p>
                   </a:txBody>
@@ -6347,7 +6347,7 @@
                           </a:solidFill>
                           <a:latin typeface="Calibri"/>
                         </a:rPr>
-                        <a:t>Não confirmado na revisão dirigida; conferir documento ou cláusula específica.</a:t>
+                        <a:t>-</a:t>
                       </a:r>
                     </a:p>
                   </a:txBody>
@@ -6443,7 +6443,7 @@
                           </a:solidFill>
                           <a:latin typeface="Calibri"/>
                         </a:rPr>
-                        <a:t>Não confirmado na revisão dirigida; conferir documento ou cláusula específica.</a:t>
+                        <a:t>-</a:t>
                       </a:r>
                     </a:p>
                   </a:txBody>
@@ -6637,7 +6637,7 @@
                           </a:solidFill>
                           <a:latin typeface="Calibri"/>
                         </a:rPr>
-                        <a:t>Não confirmado na revisão dirigida; conferir documento ou cláusula específica.</a:t>
+                        <a:t>-</a:t>
                       </a:r>
                     </a:p>
                   </a:txBody>
@@ -6841,7 +6841,7 @@
                       <a:r>
                         <a:rPr sz="1300" b="1">
                           <a:solidFill>
-                            <a:srgbClr val="1F1F1F"/>
+                            <a:srgbClr val="FFFFFF"/>
                           </a:solidFill>
                           <a:latin typeface="Calibri"/>
                         </a:rPr>
@@ -6851,7 +6851,7 @@
                   </a:txBody>
                   <a:tcPr marL="91440" marR="91440" marT="41148" marB="41148" anchor="ctr">
                     <a:solidFill>
-                      <a:srgbClr val="EC7000"/>
+                      <a:srgbClr val="FF6200"/>
                     </a:solidFill>
                     <a:lnL>
                       <a:noFill/>
@@ -6890,7 +6890,7 @@
                       <a:r>
                         <a:rPr sz="1300" b="1">
                           <a:solidFill>
-                            <a:srgbClr val="1F1F1F"/>
+                            <a:srgbClr val="FFFFFF"/>
                           </a:solidFill>
                           <a:latin typeface="Calibri"/>
                         </a:rPr>
@@ -6900,7 +6900,7 @@
                   </a:txBody>
                   <a:tcPr marL="91440" marR="91440" marT="41148" marB="41148" anchor="ctr">
                     <a:solidFill>
-                      <a:srgbClr val="EC7000"/>
+                      <a:srgbClr val="FF6200"/>
                     </a:solidFill>
                     <a:lnL>
                       <a:noFill/>
@@ -6992,7 +6992,7 @@
                           </a:solidFill>
                           <a:latin typeface="Calibri"/>
                         </a:rPr>
-                        <a:t>Não confirmado na revisão dirigida; conferir documento ou cláusula específica.</a:t>
+                        <a:t>-</a:t>
                       </a:r>
                     </a:p>
                   </a:txBody>
@@ -7088,7 +7088,7 @@
                           </a:solidFill>
                           <a:latin typeface="Calibri"/>
                         </a:rPr>
-                        <a:t>Spread final não localizado nesta revisão; conferir suplemento preenchido.</a:t>
+                        <a:t>-</a:t>
                       </a:r>
                     </a:p>
                   </a:txBody>
@@ -7486,7 +7486,7 @@
                       <a:r>
                         <a:rPr sz="1300" b="1">
                           <a:solidFill>
-                            <a:srgbClr val="1F1F1F"/>
+                            <a:srgbClr val="FFFFFF"/>
                           </a:solidFill>
                           <a:latin typeface="Calibri"/>
                         </a:rPr>
@@ -7496,7 +7496,7 @@
                   </a:txBody>
                   <a:tcPr marL="91440" marR="91440" marT="41148" marB="41148" anchor="ctr">
                     <a:solidFill>
-                      <a:srgbClr val="EC7000"/>
+                      <a:srgbClr val="FF6200"/>
                     </a:solidFill>
                     <a:lnL>
                       <a:noFill/>
@@ -7535,7 +7535,7 @@
                       <a:r>
                         <a:rPr sz="1300" b="1">
                           <a:solidFill>
-                            <a:srgbClr val="1F1F1F"/>
+                            <a:srgbClr val="FFFFFF"/>
                           </a:solidFill>
                           <a:latin typeface="Calibri"/>
                         </a:rPr>
@@ -7545,7 +7545,7 @@
                   </a:txBody>
                   <a:tcPr marL="91440" marR="91440" marT="41148" marB="41148" anchor="ctr">
                     <a:solidFill>
-                      <a:srgbClr val="EC7000"/>
+                      <a:srgbClr val="FF6200"/>
                     </a:solidFill>
                     <a:lnL>
                       <a:noFill/>
@@ -7637,7 +7637,7 @@
                           </a:solidFill>
                           <a:latin typeface="Calibri"/>
                         </a:rPr>
-                        <a:t>Não confirmado na revisão dirigida; conferir documento ou cláusula específica.</a:t>
+                        <a:t>-</a:t>
                       </a:r>
                     </a:p>
                   </a:txBody>
@@ -7733,7 +7733,7 @@
                           </a:solidFill>
                           <a:latin typeface="Calibri"/>
                         </a:rPr>
-                        <a:t>Cronograma fechado não identificado nesta revisão; conferir série/suplemento.</a:t>
+                        <a:t>-</a:t>
                       </a:r>
                     </a:p>
                   </a:txBody>
@@ -7831,7 +7831,7 @@
                           </a:solidFill>
                           <a:latin typeface="Calibri"/>
                         </a:rPr>
-                        <a:t>Não confirmado na revisão dirigida; conferir documento ou cláusula específica.</a:t>
+                        <a:t>-</a:t>
                       </a:r>
                     </a:p>
                   </a:txBody>
@@ -8035,7 +8035,7 @@
                       <a:r>
                         <a:rPr sz="1300" b="1">
                           <a:solidFill>
-                            <a:srgbClr val="1F1F1F"/>
+                            <a:srgbClr val="FFFFFF"/>
                           </a:solidFill>
                           <a:latin typeface="Calibri"/>
                         </a:rPr>
@@ -8045,7 +8045,7 @@
                   </a:txBody>
                   <a:tcPr marL="91440" marR="91440" marT="41148" marB="41148" anchor="ctr">
                     <a:solidFill>
-                      <a:srgbClr val="EC7000"/>
+                      <a:srgbClr val="FF6200"/>
                     </a:solidFill>
                     <a:lnL>
                       <a:noFill/>
@@ -8084,7 +8084,7 @@
                       <a:r>
                         <a:rPr sz="1300" b="1">
                           <a:solidFill>
-                            <a:srgbClr val="1F1F1F"/>
+                            <a:srgbClr val="FFFFFF"/>
                           </a:solidFill>
                           <a:latin typeface="Calibri"/>
                         </a:rPr>
@@ -8094,7 +8094,7 @@
                   </a:txBody>
                   <a:tcPr marL="91440" marR="91440" marT="41148" marB="41148" anchor="ctr">
                     <a:solidFill>
-                      <a:srgbClr val="EC7000"/>
+                      <a:srgbClr val="FF6200"/>
                     </a:solidFill>
                     <a:lnL>
                       <a:noFill/>
@@ -8584,7 +8584,7 @@
                       <a:r>
                         <a:rPr sz="1300" b="1">
                           <a:solidFill>
-                            <a:srgbClr val="1F1F1F"/>
+                            <a:srgbClr val="FFFFFF"/>
                           </a:solidFill>
                           <a:latin typeface="Calibri"/>
                         </a:rPr>
@@ -8594,7 +8594,7 @@
                   </a:txBody>
                   <a:tcPr marL="91440" marR="91440" marT="41148" marB="41148" anchor="ctr">
                     <a:solidFill>
-                      <a:srgbClr val="EC7000"/>
+                      <a:srgbClr val="FF6200"/>
                     </a:solidFill>
                     <a:lnL>
                       <a:noFill/>
@@ -8633,7 +8633,7 @@
                       <a:r>
                         <a:rPr sz="1300" b="1">
                           <a:solidFill>
-                            <a:srgbClr val="1F1F1F"/>
+                            <a:srgbClr val="FFFFFF"/>
                           </a:solidFill>
                           <a:latin typeface="Calibri"/>
                         </a:rPr>
@@ -8643,7 +8643,7 @@
                   </a:txBody>
                   <a:tcPr marL="91440" marR="91440" marT="41148" marB="41148" anchor="ctr">
                     <a:solidFill>
-                      <a:srgbClr val="EC7000"/>
+                      <a:srgbClr val="FF6200"/>
                     </a:solidFill>
                     <a:lnL>
                       <a:noFill/>
@@ -8757,7 +8757,7 @@
                           </a:solidFill>
                           <a:latin typeface="Calibri"/>
                         </a:rPr>
-                        <a:t>DC/PL e cotas por categoria/PL; validar regra e denominador.</a:t>
+                        <a:t>DC/PL e cotas por categoria/PL</a:t>
                       </a:r>
                     </a:p>
                   </a:txBody>
@@ -9047,7 +9047,7 @@
                           </a:solidFill>
                           <a:latin typeface="Calibri"/>
                         </a:rPr>
-                        <a:t>Sem competência IME carregada em cache local</a:t>
+                        <a:t>-</a:t>
                       </a:r>
                     </a:p>
                   </a:txBody>
